--- a/orange-yop/deck_v1.pptx
+++ b/orange-yop/deck_v1.pptx
@@ -6410,7 +6410,7 @@
         <p:spPr>
           <a:xfrm>
             <a:off x="548640" y="1508760"/>
-            <a:ext cx="6311614" cy="4206240"/>
+            <a:ext cx="5577840" cy="2300556"/>
           </a:xfrm>
           <a:prstGeom prst="rect">
             <a:avLst/>
@@ -7308,7 +7308,7 @@
         <p:spPr>
           <a:xfrm>
             <a:off x="548640" y="3246120"/>
-            <a:ext cx="2417197" cy="1463040"/>
+            <a:ext cx="1359108" cy="1463040"/>
           </a:xfrm>
           <a:prstGeom prst="rect">
             <a:avLst/>
@@ -7323,7 +7323,7 @@
         </p:nvSpPr>
         <p:spPr>
           <a:xfrm>
-            <a:off x="2377440" y="3291840"/>
+            <a:off x="2240280" y="3291840"/>
             <a:ext cx="4846320" cy="1463040"/>
           </a:xfrm>
           <a:prstGeom prst="rect">

--- a/orange-yop/deck_v1.pptx
+++ b/orange-yop/deck_v1.pptx
@@ -7308,7 +7308,7 @@
         <p:spPr>
           <a:xfrm>
             <a:off x="548640" y="3246120"/>
-            <a:ext cx="1359108" cy="1463040"/>
+            <a:ext cx="1507375" cy="1463040"/>
           </a:xfrm>
           <a:prstGeom prst="rect">
             <a:avLst/>
